--- a/stock-subscription Präsentation.pptx
+++ b/stock-subscription Präsentation.pptx
@@ -10263,28 +10263,6 @@
             </a:r>
           </a:p>
           <a:p>
-            <a:pPr marL="171450" indent="-171450">
-              <a:buFont typeface="Wingdings" pitchFamily="2" charset="2"/>
-              <a:buChar char="§"/>
-            </a:pPr>
-            <a:endParaRPr lang="en-US" sz="1400" dirty="0"/>
-          </a:p>
-          <a:p>
-            <a:pPr marL="171450" indent="-171450">
-              <a:buFont typeface="Wingdings" pitchFamily="2" charset="2"/>
-              <a:buChar char="§"/>
-            </a:pPr>
-            <a:r>
-              <a:rPr lang="de-DE" altLang="de-DE" sz="1400" dirty="0"/>
-              <a:t>Loose Coupling — Services kommunizieren nur über REST, keine direkte Abhängigkeit </a:t>
-            </a:r>
-            <a:endParaRPr lang="en-US" sz="1400" dirty="0"/>
-          </a:p>
-          <a:p>
-            <a:pPr marL="171450" indent="-171450">
-              <a:buFont typeface="Wingdings" pitchFamily="2" charset="2"/>
-              <a:buChar char="§"/>
-            </a:pPr>
             <a:endParaRPr lang="en-US" sz="1400" dirty="0"/>
           </a:p>
           <a:p>
@@ -10726,74 +10704,9 @@
               <a:buChar char="§"/>
             </a:pPr>
             <a:r>
-              <a:rPr lang="de-DE" sz="1200" dirty="0"/>
+              <a:rPr lang="de-DE" sz="1400" dirty="0"/>
               <a:t>Wiederverwendbare Logik ausgelagert in separate Module</a:t>
             </a:r>
-          </a:p>
-          <a:p>
-            <a:pPr marL="171450" indent="-171450">
-              <a:buFont typeface="Wingdings" pitchFamily="2" charset="2"/>
-              <a:buChar char="§"/>
-            </a:pPr>
-            <a:endParaRPr lang="en-US" sz="1200" dirty="0"/>
-          </a:p>
-          <a:p>
-            <a:pPr marL="171450" indent="-171450">
-              <a:buFont typeface="Wingdings" pitchFamily="2" charset="2"/>
-              <a:buChar char="§"/>
-            </a:pPr>
-            <a:r>
-              <a:rPr lang="en-US" sz="1200" dirty="0" err="1"/>
-              <a:t>Reaktive</a:t>
-            </a:r>
-            <a:r>
-              <a:rPr lang="en-US" sz="1200" dirty="0"/>
-              <a:t> </a:t>
-            </a:r>
-            <a:r>
-              <a:rPr lang="en-US" sz="1200" dirty="0" err="1"/>
-              <a:t>Datenbindung</a:t>
-            </a:r>
-            <a:r>
-              <a:rPr lang="en-US" sz="1200" dirty="0"/>
-              <a:t>: UI </a:t>
-            </a:r>
-            <a:r>
-              <a:rPr lang="en-US" sz="1200" dirty="0" err="1"/>
-              <a:t>aktualisiert</a:t>
-            </a:r>
-            <a:r>
-              <a:rPr lang="en-US" sz="1200" dirty="0"/>
-              <a:t> </a:t>
-            </a:r>
-            <a:r>
-              <a:rPr lang="en-US" sz="1200" dirty="0" err="1"/>
-              <a:t>sich</a:t>
-            </a:r>
-            <a:r>
-              <a:rPr lang="en-US" sz="1200" dirty="0"/>
-              <a:t> </a:t>
-            </a:r>
-            <a:r>
-              <a:rPr lang="en-US" sz="1200" dirty="0" err="1"/>
-              <a:t>ohne</a:t>
-            </a:r>
-            <a:r>
-              <a:rPr lang="en-US" sz="1200" dirty="0"/>
-              <a:t> </a:t>
-            </a:r>
-            <a:r>
-              <a:rPr lang="en-US" sz="1200" dirty="0" err="1"/>
-              <a:t>Seitenreload</a:t>
-            </a:r>
-            <a:endParaRPr lang="en-US" sz="1200" dirty="0"/>
-          </a:p>
-          <a:p>
-            <a:pPr marL="171450" indent="-171450">
-              <a:buFont typeface="Wingdings" pitchFamily="2" charset="2"/>
-              <a:buChar char="§"/>
-            </a:pPr>
-            <a:endParaRPr lang="en-US" sz="1000" dirty="0"/>
           </a:p>
         </p:txBody>
       </p:sp>
@@ -10973,34 +10886,16 @@
           <a:bodyPr wrap="square" lIns="0" tIns="0" rIns="0" bIns="0" rtlCol="0" anchor="ctr"/>
           <a:lstStyle/>
           <a:p>
-            <a:pPr marL="171450" indent="-171450">
-              <a:buFont typeface="Wingdings" pitchFamily="2" charset="2"/>
+            <a:pPr marL="285750" indent="-285750">
+              <a:buFont typeface="Wingdings" panose="05000000000000000000" pitchFamily="2" charset="2"/>
               <a:buChar char="§"/>
             </a:pPr>
             <a:r>
-              <a:rPr lang="de-DE" sz="1200" dirty="0"/>
-              <a:t>Asynchrone Kommunikation — UI bleibt während Serveranfragen reaktionsfähig</a:t>
-            </a:r>
-            <a:endParaRPr lang="en-US" sz="1200" dirty="0"/>
-          </a:p>
-          <a:p>
-            <a:pPr marL="171450" indent="-171450">
-              <a:buFont typeface="Wingdings" pitchFamily="2" charset="2"/>
-              <a:buChar char="§"/>
-            </a:pPr>
-            <a:endParaRPr lang="en-US" altLang="de-DE" sz="1200" dirty="0"/>
-          </a:p>
-          <a:p>
-            <a:pPr marL="171450" indent="-171450">
-              <a:buFont typeface="Wingdings" pitchFamily="2" charset="2"/>
-              <a:buChar char="§"/>
-            </a:pPr>
-            <a:r>
-              <a:rPr lang="de-DE" altLang="de-DE" sz="1200" dirty="0" err="1"/>
+              <a:rPr lang="de-DE" altLang="de-DE" sz="1400" dirty="0" err="1"/>
               <a:t>Timer</a:t>
             </a:r>
             <a:r>
-              <a:rPr lang="de-DE" altLang="de-DE" sz="1200" dirty="0"/>
+              <a:rPr lang="de-DE" altLang="de-DE" sz="1400" dirty="0"/>
               <a:t> für automatisches Polling alle 5 Sekunden </a:t>
             </a:r>
           </a:p>
@@ -11196,34 +11091,11 @@
               <a:spcAft>
                 <a:spcPct val="0"/>
               </a:spcAft>
-              <a:buFont typeface="Wingdings" pitchFamily="2" charset="2"/>
+              <a:buFont typeface="Wingdings" panose="05000000000000000000" pitchFamily="2" charset="2"/>
               <a:buChar char="§"/>
             </a:pPr>
             <a:r>
-              <a:rPr lang="de-DE" altLang="de-DE" sz="1200" dirty="0"/>
-              <a:t>Modernes UI-Design passend zum Finanzkontext </a:t>
-            </a:r>
-          </a:p>
-          <a:p>
-            <a:pPr marL="171450" indent="-171450">
-              <a:buFont typeface="Wingdings" pitchFamily="2" charset="2"/>
-              <a:buChar char="§"/>
-            </a:pPr>
-            <a:endParaRPr lang="en-US" sz="1200" dirty="0"/>
-          </a:p>
-          <a:p>
-            <a:pPr marL="171450" lvl="0" indent="-171450" eaLnBrk="0" fontAlgn="base" hangingPunct="0">
-              <a:spcBef>
-                <a:spcPct val="0"/>
-              </a:spcBef>
-              <a:spcAft>
-                <a:spcPct val="0"/>
-              </a:spcAft>
-              <a:buFont typeface="Wingdings" pitchFamily="2" charset="2"/>
-              <a:buChar char="§"/>
-            </a:pPr>
-            <a:r>
-              <a:rPr lang="de-DE" altLang="de-DE" sz="1200" dirty="0"/>
+              <a:rPr lang="de-DE" altLang="de-DE" sz="1400" dirty="0"/>
               <a:t>Klare Trennung von Struktur (HTML) und Darstellung (CSS) </a:t>
             </a:r>
           </a:p>
@@ -11410,59 +11282,22 @@
               <a:buChar char="§"/>
             </a:pPr>
             <a:r>
-              <a:rPr lang="en-US" sz="1200" dirty="0"/>
+              <a:rPr lang="en-US" sz="1400" dirty="0"/>
               <a:t>Browser-native Schnittstelle für </a:t>
             </a:r>
             <a:r>
-              <a:rPr lang="en-US" sz="1200" dirty="0" err="1"/>
+              <a:rPr lang="en-US" sz="1400" dirty="0" err="1"/>
               <a:t>asynchrone</a:t>
             </a:r>
             <a:r>
-              <a:rPr lang="en-US" sz="1200" dirty="0"/>
+              <a:rPr lang="en-US" sz="1400" dirty="0"/>
               <a:t> REST-</a:t>
             </a:r>
             <a:r>
-              <a:rPr lang="en-US" sz="1200" dirty="0" err="1"/>
+              <a:rPr lang="en-US" sz="1400" dirty="0" err="1"/>
               <a:t>Aufrufe</a:t>
             </a:r>
-            <a:endParaRPr lang="en-US" sz="1200" dirty="0"/>
-          </a:p>
-          <a:p>
-            <a:pPr marL="171450" indent="-171450">
-              <a:buFont typeface="Wingdings" pitchFamily="2" charset="2"/>
-              <a:buChar char="§"/>
-            </a:pPr>
-            <a:endParaRPr lang="en-US" sz="1200" dirty="0"/>
-          </a:p>
-          <a:p>
-            <a:pPr marL="171450" indent="-171450">
-              <a:buFont typeface="Wingdings" pitchFamily="2" charset="2"/>
-              <a:buChar char="§"/>
-            </a:pPr>
-            <a:r>
-              <a:rPr lang="en-US" sz="1200" dirty="0" err="1"/>
-              <a:t>Kommuniziert</a:t>
-            </a:r>
-            <a:r>
-              <a:rPr lang="en-US" sz="1200" dirty="0"/>
-              <a:t> </a:t>
-            </a:r>
-            <a:r>
-              <a:rPr lang="en-US" sz="1200" dirty="0" err="1"/>
-              <a:t>ausschließlich</a:t>
-            </a:r>
-            <a:r>
-              <a:rPr lang="en-US" sz="1200" dirty="0"/>
-              <a:t> </a:t>
-            </a:r>
-            <a:r>
-              <a:rPr lang="en-US" sz="1200" dirty="0" err="1"/>
-              <a:t>mit</a:t>
-            </a:r>
-            <a:r>
-              <a:rPr lang="en-US" sz="1200" dirty="0"/>
-              <a:t> dem Orchestrator </a:t>
-            </a:r>
+            <a:endParaRPr lang="en-US" sz="1400" dirty="0"/>
           </a:p>
         </p:txBody>
       </p:sp>
@@ -11950,47 +11785,30 @@
               <a:buChar char="§"/>
             </a:pPr>
             <a:r>
-              <a:rPr lang="en-US" sz="1200" dirty="0"/>
+              <a:rPr lang="en-US" sz="1400" dirty="0"/>
               <a:t>Schnelle </a:t>
             </a:r>
             <a:r>
-              <a:rPr lang="en-US" sz="1200" dirty="0" err="1"/>
+              <a:rPr lang="en-US" sz="1400" dirty="0" err="1"/>
               <a:t>Startzeiten</a:t>
             </a:r>
             <a:r>
-              <a:rPr lang="en-US" sz="1200" dirty="0"/>
+              <a:rPr lang="en-US" sz="1400" dirty="0"/>
               <a:t> und </a:t>
             </a:r>
             <a:r>
-              <a:rPr lang="en-US" sz="1200" dirty="0" err="1"/>
+              <a:rPr lang="en-US" sz="1400" dirty="0" err="1"/>
               <a:t>geringer</a:t>
             </a:r>
             <a:r>
-              <a:rPr lang="en-US" sz="1200" dirty="0"/>
+              <a:rPr lang="en-US" sz="1400" dirty="0"/>
               <a:t> </a:t>
             </a:r>
             <a:r>
-              <a:rPr lang="en-US" sz="1200" dirty="0" err="1"/>
+              <a:rPr lang="en-US" sz="1400" dirty="0" err="1"/>
               <a:t>Speicherbedarf</a:t>
             </a:r>
-            <a:endParaRPr lang="en-US" sz="1200" dirty="0"/>
-          </a:p>
-          <a:p>
-            <a:pPr marL="171450" indent="-171450">
-              <a:buFont typeface="Wingdings" pitchFamily="2" charset="2"/>
-              <a:buChar char="§"/>
-            </a:pPr>
-            <a:endParaRPr lang="en-US" sz="1200" dirty="0"/>
-          </a:p>
-          <a:p>
-            <a:pPr marL="171450" indent="-171450">
-              <a:buFont typeface="Wingdings" pitchFamily="2" charset="2"/>
-              <a:buChar char="§"/>
-            </a:pPr>
-            <a:r>
-              <a:rPr lang="de-DE" sz="1200" dirty="0"/>
-              <a:t>Einfache REST-Endpoints via @Path, @GET, @POST</a:t>
-            </a:r>
+            <a:endParaRPr lang="en-US" sz="1400" dirty="0"/>
           </a:p>
         </p:txBody>
       </p:sp>
@@ -12175,51 +11993,22 @@
           <a:bodyPr wrap="square" lIns="0" tIns="0" rIns="0" bIns="0" rtlCol="0" anchor="ctr"/>
           <a:lstStyle/>
           <a:p>
-            <a:pPr marL="171450" lvl="0" indent="-171450" eaLnBrk="0" fontAlgn="base" hangingPunct="0">
+            <a:pPr marL="285750" indent="-285750" eaLnBrk="0" fontAlgn="base" hangingPunct="0">
               <a:spcBef>
                 <a:spcPct val="0"/>
               </a:spcBef>
               <a:spcAft>
                 <a:spcPct val="0"/>
               </a:spcAft>
-              <a:buFont typeface="Wingdings" pitchFamily="2" charset="2"/>
+              <a:buFont typeface="Wingdings" panose="05000000000000000000" pitchFamily="2" charset="2"/>
               <a:buChar char="§"/>
             </a:pPr>
             <a:r>
-              <a:rPr lang="de-DE" altLang="de-DE" sz="1200" dirty="0"/>
-              <a:t>Services kommunizieren ausschließlich über HTTP/JSON </a:t>
-            </a:r>
-          </a:p>
-          <a:p>
-            <a:pPr marL="171450" indent="-171450" eaLnBrk="0" fontAlgn="base" hangingPunct="0">
-              <a:spcBef>
-                <a:spcPct val="0"/>
-              </a:spcBef>
-              <a:spcAft>
-                <a:spcPct val="0"/>
-              </a:spcAft>
-              <a:buFont typeface="Wingdings" pitchFamily="2" charset="2"/>
-              <a:buChar char="§"/>
-            </a:pPr>
-            <a:endParaRPr lang="de-DE" sz="1200" dirty="0"/>
-          </a:p>
-          <a:p>
-            <a:pPr marL="171450" indent="-171450" eaLnBrk="0" fontAlgn="base" hangingPunct="0">
-              <a:spcBef>
-                <a:spcPct val="0"/>
-              </a:spcBef>
-              <a:spcAft>
-                <a:spcPct val="0"/>
-              </a:spcAft>
-              <a:buFont typeface="Wingdings" pitchFamily="2" charset="2"/>
-              <a:buChar char="§"/>
-            </a:pPr>
-            <a:r>
-              <a:rPr lang="de-DE" sz="1200" dirty="0" err="1"/>
+              <a:rPr lang="de-DE" sz="1400" dirty="0" err="1"/>
               <a:t>Orchestrator</a:t>
             </a:r>
             <a:r>
-              <a:rPr lang="de-DE" sz="1200" dirty="0"/>
+              <a:rPr lang="de-DE" sz="1400" dirty="0"/>
               <a:t> als einziger Einstiegspunkt — interne Services nicht von außen erreichbar</a:t>
             </a:r>
           </a:p>
@@ -12401,45 +12190,20 @@
           <a:bodyPr wrap="square" lIns="0" tIns="0" rIns="0" bIns="0" rtlCol="0" anchor="ctr"/>
           <a:lstStyle/>
           <a:p>
-            <a:pPr marL="171450" indent="-171450">
-              <a:buFont typeface="Wingdings" pitchFamily="2" charset="2"/>
+            <a:pPr marL="285750" indent="-285750">
+              <a:buFont typeface="Wingdings" panose="05000000000000000000" pitchFamily="2" charset="2"/>
               <a:buChar char="§"/>
             </a:pPr>
             <a:r>
-              <a:rPr lang="en-US" sz="1200" dirty="0"/>
-              <a:t>Jeder Service läuft in einem </a:t>
-            </a:r>
-            <a:r>
-              <a:rPr lang="en-US" sz="1200" dirty="0" err="1"/>
-              <a:t>eigenen</a:t>
-            </a:r>
-            <a:r>
-              <a:rPr lang="en-US" sz="1200" dirty="0"/>
-              <a:t> Container</a:t>
-            </a:r>
-          </a:p>
-          <a:p>
-            <a:pPr marL="171450" indent="-171450">
-              <a:buFont typeface="Wingdings" pitchFamily="2" charset="2"/>
-              <a:buChar char="§"/>
-            </a:pPr>
-            <a:endParaRPr lang="en-US" sz="1200" dirty="0"/>
-          </a:p>
-          <a:p>
-            <a:pPr marL="171450" indent="-171450">
-              <a:buFont typeface="Wingdings" pitchFamily="2" charset="2"/>
-              <a:buChar char="§"/>
-            </a:pPr>
-            <a:r>
-              <a:rPr lang="en-US" sz="1200" dirty="0"/>
+              <a:rPr lang="en-US" sz="1400" dirty="0"/>
               <a:t>Docker-compose </a:t>
             </a:r>
             <a:r>
-              <a:rPr lang="en-US" sz="1200" dirty="0" err="1"/>
+              <a:rPr lang="en-US" sz="1400" dirty="0" err="1"/>
               <a:t>orchestriert</a:t>
             </a:r>
             <a:r>
-              <a:rPr lang="en-US" sz="1200" dirty="0"/>
+              <a:rPr lang="en-US" sz="1400" dirty="0"/>
               <a:t> alle Services + PostgreSQL</a:t>
             </a:r>
           </a:p>
@@ -12626,54 +12390,28 @@
               <a:buChar char="§"/>
             </a:pPr>
             <a:r>
-              <a:rPr lang="en-US" sz="1200" dirty="0"/>
+              <a:rPr lang="en-US" sz="1400" dirty="0"/>
               <a:t>Persistente Speicherung von Abonnements und </a:t>
             </a:r>
             <a:r>
-              <a:rPr lang="en-US" sz="1200" dirty="0" err="1"/>
+              <a:rPr lang="en-US" sz="1400" dirty="0" err="1"/>
               <a:t>ausgelösten</a:t>
             </a:r>
             <a:r>
-              <a:rPr lang="en-US" sz="1200" dirty="0"/>
+              <a:rPr lang="en-US" sz="1400" dirty="0"/>
               <a:t> Alerts</a:t>
             </a:r>
           </a:p>
           <a:p>
-            <a:pPr marL="171450" lvl="0" indent="-171450" eaLnBrk="0" fontAlgn="base" hangingPunct="0">
+            <a:pPr lvl="0" eaLnBrk="0" fontAlgn="base" hangingPunct="0">
               <a:spcBef>
                 <a:spcPct val="0"/>
               </a:spcBef>
               <a:spcAft>
                 <a:spcPct val="0"/>
               </a:spcAft>
-              <a:buFont typeface="Wingdings" pitchFamily="2" charset="2"/>
-              <a:buChar char="§"/>
             </a:pPr>
             <a:endParaRPr lang="de-DE" altLang="de-DE" sz="1200" dirty="0"/>
-          </a:p>
-          <a:p>
-            <a:pPr marL="171450" lvl="0" indent="-171450" eaLnBrk="0" fontAlgn="base" hangingPunct="0">
-              <a:spcBef>
-                <a:spcPct val="0"/>
-              </a:spcBef>
-              <a:spcAft>
-                <a:spcPct val="0"/>
-              </a:spcAft>
-              <a:buFont typeface="Wingdings" pitchFamily="2" charset="2"/>
-              <a:buChar char="§"/>
-            </a:pPr>
-            <a:r>
-              <a:rPr lang="de-DE" altLang="de-DE" sz="1200" dirty="0"/>
-              <a:t>Transaktionssicherheit durch @</a:t>
-            </a:r>
-            <a:r>
-              <a:rPr lang="de-DE" altLang="de-DE" sz="1200" dirty="0" err="1"/>
-              <a:t>Transactional</a:t>
-            </a:r>
-            <a:r>
-              <a:rPr lang="de-DE" altLang="de-DE" sz="1200" dirty="0"/>
-              <a:t> </a:t>
-            </a:r>
           </a:p>
         </p:txBody>
       </p:sp>
